--- a/user_manuls/mySVCA.pptx
+++ b/user_manuls/mySVCA.pptx
@@ -9,6 +9,8 @@
     <p:sldId id="257" r:id="rId3"/>
     <p:sldId id="258" r:id="rId4"/>
     <p:sldId id="259" r:id="rId5"/>
+    <p:sldId id="261" r:id="rId6"/>
+    <p:sldId id="262" r:id="rId7"/>
   </p:sldIdLst>
   <p:sldSz cx="12192000" cy="6858000"/>
   <p:notesSz cx="6858000" cy="9144000"/>
@@ -107,6 +109,11 @@
       </a:defRPr>
     </a:lvl9pPr>
   </p:defaultTextStyle>
+  <p:extLst>
+    <p:ext uri="{EFAFB233-063F-42B5-8137-9DF3F51BA10A}">
+      <p15:sldGuideLst xmlns:p15="http://schemas.microsoft.com/office/powerpoint/2012/main"/>
+    </p:ext>
+  </p:extLst>
 </p:presentation>
 </file>
 
@@ -302,7 +309,7 @@
             <a:fld id="{B61BEF0D-F0BB-DE4B-95CE-6DB70DBA9567}" type="datetimeFigureOut">
               <a:rPr lang="en-US" dirty="0"/>
               <a:pPr/>
-              <a:t>4/3/2026</a:t>
+              <a:t>4/4/2026</a:t>
             </a:fld>
             <a:endParaRPr lang="en-US" dirty="0"/>
           </a:p>
@@ -735,7 +742,7 @@
             <a:fld id="{B61BEF0D-F0BB-DE4B-95CE-6DB70DBA9567}" type="datetimeFigureOut">
               <a:rPr lang="en-US" dirty="0"/>
               <a:pPr/>
-              <a:t>4/3/2026</a:t>
+              <a:t>4/4/2026</a:t>
             </a:fld>
             <a:endParaRPr lang="en-US" dirty="0"/>
           </a:p>
@@ -982,7 +989,7 @@
             <a:fld id="{B61BEF0D-F0BB-DE4B-95CE-6DB70DBA9567}" type="datetimeFigureOut">
               <a:rPr lang="en-US" dirty="0"/>
               <a:pPr/>
-              <a:t>4/3/2026</a:t>
+              <a:t>4/4/2026</a:t>
             </a:fld>
             <a:endParaRPr lang="en-US" dirty="0"/>
           </a:p>
@@ -1287,7 +1294,7 @@
             <a:fld id="{B61BEF0D-F0BB-DE4B-95CE-6DB70DBA9567}" type="datetimeFigureOut">
               <a:rPr lang="en-US" dirty="0"/>
               <a:pPr/>
-              <a:t>4/3/2026</a:t>
+              <a:t>4/4/2026</a:t>
             </a:fld>
             <a:endParaRPr lang="en-US" dirty="0"/>
           </a:p>
@@ -1602,7 +1609,7 @@
             <a:fld id="{B61BEF0D-F0BB-DE4B-95CE-6DB70DBA9567}" type="datetimeFigureOut">
               <a:rPr lang="en-US" dirty="0"/>
               <a:pPr/>
-              <a:t>4/3/2026</a:t>
+              <a:t>4/4/2026</a:t>
             </a:fld>
             <a:endParaRPr lang="en-US" dirty="0"/>
           </a:p>
@@ -1901,7 +1908,7 @@
             <a:fld id="{B61BEF0D-F0BB-DE4B-95CE-6DB70DBA9567}" type="datetimeFigureOut">
               <a:rPr lang="en-US" dirty="0"/>
               <a:pPr/>
-              <a:t>4/3/2026</a:t>
+              <a:t>4/4/2026</a:t>
             </a:fld>
             <a:endParaRPr lang="en-US" dirty="0"/>
           </a:p>
@@ -2265,7 +2272,7 @@
             <a:fld id="{B61BEF0D-F0BB-DE4B-95CE-6DB70DBA9567}" type="datetimeFigureOut">
               <a:rPr lang="en-US" dirty="0"/>
               <a:pPr/>
-              <a:t>4/3/2026</a:t>
+              <a:t>4/4/2026</a:t>
             </a:fld>
             <a:endParaRPr lang="en-US" dirty="0"/>
           </a:p>
@@ -2436,7 +2443,7 @@
             <a:fld id="{B61BEF0D-F0BB-DE4B-95CE-6DB70DBA9567}" type="datetimeFigureOut">
               <a:rPr lang="en-US" dirty="0"/>
               <a:pPr/>
-              <a:t>4/3/2026</a:t>
+              <a:t>4/4/2026</a:t>
             </a:fld>
             <a:endParaRPr lang="en-US" dirty="0"/>
           </a:p>
@@ -2613,7 +2620,7 @@
             <a:fld id="{B61BEF0D-F0BB-DE4B-95CE-6DB70DBA9567}" type="datetimeFigureOut">
               <a:rPr lang="en-US" dirty="0"/>
               <a:pPr/>
-              <a:t>4/3/2026</a:t>
+              <a:t>4/4/2026</a:t>
             </a:fld>
             <a:endParaRPr lang="en-US" dirty="0"/>
           </a:p>
@@ -2780,7 +2787,7 @@
             <a:fld id="{B61BEF0D-F0BB-DE4B-95CE-6DB70DBA9567}" type="datetimeFigureOut">
               <a:rPr lang="en-US" dirty="0"/>
               <a:pPr/>
-              <a:t>4/3/2026</a:t>
+              <a:t>4/4/2026</a:t>
             </a:fld>
             <a:endParaRPr lang="en-US" dirty="0"/>
           </a:p>
@@ -3027,7 +3034,7 @@
             <a:fld id="{B61BEF0D-F0BB-DE4B-95CE-6DB70DBA9567}" type="datetimeFigureOut">
               <a:rPr lang="en-US" dirty="0"/>
               <a:pPr/>
-              <a:t>4/3/2026</a:t>
+              <a:t>4/4/2026</a:t>
             </a:fld>
             <a:endParaRPr lang="en-US" dirty="0"/>
           </a:p>
@@ -3260,7 +3267,7 @@
             <a:fld id="{B61BEF0D-F0BB-DE4B-95CE-6DB70DBA9567}" type="datetimeFigureOut">
               <a:rPr lang="en-US" dirty="0"/>
               <a:pPr/>
-              <a:t>4/3/2026</a:t>
+              <a:t>4/4/2026</a:t>
             </a:fld>
             <a:endParaRPr lang="en-US" dirty="0"/>
           </a:p>
@@ -3639,7 +3646,7 @@
             <a:fld id="{B61BEF0D-F0BB-DE4B-95CE-6DB70DBA9567}" type="datetimeFigureOut">
               <a:rPr lang="en-US" dirty="0"/>
               <a:pPr/>
-              <a:t>4/3/2026</a:t>
+              <a:t>4/4/2026</a:t>
             </a:fld>
             <a:endParaRPr lang="en-US" dirty="0"/>
           </a:p>
@@ -3754,7 +3761,7 @@
             <a:fld id="{B61BEF0D-F0BB-DE4B-95CE-6DB70DBA9567}" type="datetimeFigureOut">
               <a:rPr lang="en-US" dirty="0"/>
               <a:pPr/>
-              <a:t>4/3/2026</a:t>
+              <a:t>4/4/2026</a:t>
             </a:fld>
             <a:endParaRPr lang="en-US" dirty="0"/>
           </a:p>
@@ -3846,7 +3853,7 @@
             <a:fld id="{B61BEF0D-F0BB-DE4B-95CE-6DB70DBA9567}" type="datetimeFigureOut">
               <a:rPr lang="en-US" dirty="0"/>
               <a:pPr/>
-              <a:t>4/3/2026</a:t>
+              <a:t>4/4/2026</a:t>
             </a:fld>
             <a:endParaRPr lang="en-US" dirty="0"/>
           </a:p>
@@ -4098,7 +4105,7 @@
             <a:fld id="{B61BEF0D-F0BB-DE4B-95CE-6DB70DBA9567}" type="datetimeFigureOut">
               <a:rPr lang="en-US" dirty="0"/>
               <a:pPr/>
-              <a:t>4/3/2026</a:t>
+              <a:t>4/4/2026</a:t>
             </a:fld>
             <a:endParaRPr lang="en-US" dirty="0"/>
           </a:p>
@@ -4378,7 +4385,7 @@
             <a:fld id="{B61BEF0D-F0BB-DE4B-95CE-6DB70DBA9567}" type="datetimeFigureOut">
               <a:rPr lang="en-US" dirty="0"/>
               <a:pPr/>
-              <a:t>4/3/2026</a:t>
+              <a:t>4/4/2026</a:t>
             </a:fld>
             <a:endParaRPr lang="en-US" dirty="0"/>
           </a:p>
@@ -4781,7 +4788,7 @@
             <a:fld id="{B61BEF0D-F0BB-DE4B-95CE-6DB70DBA9567}" type="datetimeFigureOut">
               <a:rPr lang="en-US" dirty="0"/>
               <a:pPr/>
-              <a:t>4/3/2026</a:t>
+              <a:t>4/4/2026</a:t>
             </a:fld>
             <a:endParaRPr lang="en-US" dirty="0"/>
           </a:p>
@@ -7387,8 +7394,8 @@
         </p:nvSpPr>
         <p:spPr>
           <a:xfrm>
-            <a:off x="1012370" y="2326822"/>
-            <a:ext cx="10001250" cy="1338828"/>
+            <a:off x="1012370" y="2139044"/>
+            <a:ext cx="10001250" cy="4247317"/>
           </a:xfrm>
           <a:prstGeom prst="rect">
             <a:avLst/>
@@ -7410,8 +7417,13 @@
             </a:pPr>
             <a:r>
               <a:rPr lang="gu-IN" dirty="0" smtClean="0"/>
-              <a:t>મહિનો select કરવા માટે.</a:t>
-            </a:r>
+              <a:t>મહિનો select કરવા માટે</a:t>
+            </a:r>
+            <a:r>
+              <a:rPr lang="gu-IN" dirty="0" smtClean="0"/>
+              <a:t>.</a:t>
+            </a:r>
+            <a:endParaRPr lang="en-US" dirty="0" smtClean="0"/>
           </a:p>
           <a:p>
             <a:pPr marL="342900" indent="-342900">
@@ -7421,7 +7433,22 @@
               <a:buFont typeface="+mj-lt"/>
               <a:buAutoNum type="arabicPeriod"/>
             </a:pPr>
-            <a:endParaRPr lang="gu-IN" dirty="0" smtClean="0"/>
+            <a:r>
+              <a:rPr lang="en-IN" dirty="0" smtClean="0"/>
+              <a:t>S</a:t>
+            </a:r>
+            <a:r>
+              <a:rPr lang="gu-IN" dirty="0" smtClean="0"/>
+              <a:t>elect કરેલા મહિના માં થઈલા total </a:t>
+            </a:r>
+            <a:r>
+              <a:rPr lang="en-IN" dirty="0"/>
+              <a:t>Admission</a:t>
+            </a:r>
+            <a:r>
+              <a:rPr lang="gu-IN" dirty="0" smtClean="0"/>
+              <a:t> દર્શાવે છે.</a:t>
+            </a:r>
           </a:p>
           <a:p>
             <a:pPr marL="342900" indent="-342900">
@@ -7431,7 +7458,270 @@
               <a:buFont typeface="+mj-lt"/>
               <a:buAutoNum type="arabicPeriod"/>
             </a:pPr>
-            <a:endParaRPr lang="en-IN" dirty="0"/>
+            <a:r>
+              <a:rPr lang="en-IN" dirty="0" smtClean="0"/>
+              <a:t>S</a:t>
+            </a:r>
+            <a:r>
+              <a:rPr lang="gu-IN" dirty="0"/>
+              <a:t>elect કરેલા મહિના માં </a:t>
+            </a:r>
+            <a:r>
+              <a:rPr lang="gu-IN" dirty="0" smtClean="0"/>
+              <a:t>થઈલી </a:t>
+            </a:r>
+            <a:r>
+              <a:rPr lang="gu-IN" dirty="0"/>
+              <a:t>total </a:t>
+            </a:r>
+            <a:r>
+              <a:rPr lang="en-IN" dirty="0" smtClean="0"/>
+              <a:t>Inquiries</a:t>
+            </a:r>
+            <a:r>
+              <a:rPr lang="gu-IN" b="1" dirty="0" smtClean="0"/>
+              <a:t> </a:t>
+            </a:r>
+            <a:r>
+              <a:rPr lang="gu-IN" dirty="0" smtClean="0"/>
+              <a:t>દર્શાવે </a:t>
+            </a:r>
+            <a:r>
+              <a:rPr lang="gu-IN" dirty="0"/>
+              <a:t>છે</a:t>
+            </a:r>
+            <a:r>
+              <a:rPr lang="gu-IN" dirty="0" smtClean="0"/>
+              <a:t>.</a:t>
+            </a:r>
+          </a:p>
+          <a:p>
+            <a:pPr marL="342900" indent="-342900">
+              <a:lnSpc>
+                <a:spcPct val="150000"/>
+              </a:lnSpc>
+              <a:buFont typeface="+mj-lt"/>
+              <a:buAutoNum type="arabicPeriod"/>
+            </a:pPr>
+            <a:r>
+              <a:rPr lang="en-IN" dirty="0"/>
+              <a:t>S</a:t>
+            </a:r>
+            <a:r>
+              <a:rPr lang="gu-IN" dirty="0"/>
+              <a:t>elect કરેલા મહિના </a:t>
+            </a:r>
+            <a:r>
+              <a:rPr lang="gu-IN" dirty="0" smtClean="0"/>
+              <a:t>ના </a:t>
+            </a:r>
+            <a:r>
+              <a:rPr lang="gu-IN" dirty="0"/>
+              <a:t>total </a:t>
+            </a:r>
+            <a:r>
+              <a:rPr lang="en-IN" dirty="0"/>
+              <a:t>Follow </a:t>
+            </a:r>
+            <a:r>
+              <a:rPr lang="en-IN" dirty="0" smtClean="0"/>
+              <a:t>Up</a:t>
+            </a:r>
+            <a:r>
+              <a:rPr lang="gu-IN" b="1" dirty="0" smtClean="0"/>
+              <a:t> </a:t>
+            </a:r>
+            <a:r>
+              <a:rPr lang="gu-IN" dirty="0" smtClean="0"/>
+              <a:t>દર્શાવે </a:t>
+            </a:r>
+            <a:r>
+              <a:rPr lang="gu-IN" dirty="0"/>
+              <a:t>છે</a:t>
+            </a:r>
+            <a:r>
+              <a:rPr lang="gu-IN" dirty="0" smtClean="0"/>
+              <a:t>.</a:t>
+            </a:r>
+          </a:p>
+          <a:p>
+            <a:pPr marL="342900" indent="-342900">
+              <a:lnSpc>
+                <a:spcPct val="150000"/>
+              </a:lnSpc>
+              <a:buFont typeface="+mj-lt"/>
+              <a:buAutoNum type="arabicPeriod"/>
+            </a:pPr>
+            <a:r>
+              <a:rPr lang="en-IN" dirty="0" smtClean="0"/>
+              <a:t>C</a:t>
+            </a:r>
+            <a:r>
+              <a:rPr lang="gu-IN" dirty="0" smtClean="0"/>
+              <a:t>enter ના total student </a:t>
+            </a:r>
+            <a:r>
+              <a:rPr lang="gu-IN" dirty="0"/>
+              <a:t>દર્શાવે છે</a:t>
+            </a:r>
+            <a:r>
+              <a:rPr lang="gu-IN" dirty="0" smtClean="0"/>
+              <a:t>.</a:t>
+            </a:r>
+          </a:p>
+          <a:p>
+            <a:pPr marL="342900" indent="-342900">
+              <a:lnSpc>
+                <a:spcPct val="150000"/>
+              </a:lnSpc>
+              <a:buFont typeface="+mj-lt"/>
+              <a:buAutoNum type="arabicPeriod"/>
+            </a:pPr>
+            <a:r>
+              <a:rPr lang="en-IN" dirty="0"/>
+              <a:t>C</a:t>
+            </a:r>
+            <a:r>
+              <a:rPr lang="gu-IN" dirty="0"/>
+              <a:t>enter </a:t>
+            </a:r>
+            <a:r>
+              <a:rPr lang="gu-IN" dirty="0" smtClean="0"/>
+              <a:t>ની </a:t>
+            </a:r>
+            <a:r>
+              <a:rPr lang="gu-IN" dirty="0"/>
+              <a:t>total </a:t>
+            </a:r>
+            <a:r>
+              <a:rPr lang="en-IN" dirty="0" smtClean="0"/>
+              <a:t>Inquiries</a:t>
+            </a:r>
+            <a:r>
+              <a:rPr lang="gu-IN" b="1" dirty="0" smtClean="0"/>
+              <a:t> </a:t>
+            </a:r>
+            <a:r>
+              <a:rPr lang="gu-IN" dirty="0" smtClean="0"/>
+              <a:t>દર્શાવે </a:t>
+            </a:r>
+            <a:r>
+              <a:rPr lang="gu-IN" dirty="0"/>
+              <a:t>છે</a:t>
+            </a:r>
+            <a:r>
+              <a:rPr lang="gu-IN" dirty="0" smtClean="0"/>
+              <a:t>.</a:t>
+            </a:r>
+          </a:p>
+          <a:p>
+            <a:pPr marL="342900" indent="-342900">
+              <a:lnSpc>
+                <a:spcPct val="150000"/>
+              </a:lnSpc>
+              <a:buFont typeface="+mj-lt"/>
+              <a:buAutoNum type="arabicPeriod"/>
+            </a:pPr>
+            <a:r>
+              <a:rPr lang="gu-IN" dirty="0" smtClean="0"/>
+              <a:t>આજની total </a:t>
+            </a:r>
+            <a:r>
+              <a:rPr lang="en-IN" dirty="0"/>
+              <a:t>Follow </a:t>
+            </a:r>
+            <a:r>
+              <a:rPr lang="en-IN" dirty="0" smtClean="0"/>
+              <a:t>Up</a:t>
+            </a:r>
+            <a:r>
+              <a:rPr lang="gu-IN" dirty="0" smtClean="0"/>
+              <a:t> ની list </a:t>
+            </a:r>
+            <a:r>
+              <a:rPr lang="gu-IN" dirty="0"/>
+              <a:t>દર્શાવે છે</a:t>
+            </a:r>
+            <a:r>
+              <a:rPr lang="gu-IN" dirty="0" smtClean="0"/>
+              <a:t>.</a:t>
+            </a:r>
+          </a:p>
+          <a:p>
+            <a:pPr marL="342900" indent="-342900">
+              <a:lnSpc>
+                <a:spcPct val="150000"/>
+              </a:lnSpc>
+              <a:buFont typeface="+mj-lt"/>
+              <a:buAutoNum type="arabicPeriod"/>
+            </a:pPr>
+            <a:r>
+              <a:rPr lang="en-IN" dirty="0" smtClean="0"/>
+              <a:t>L</a:t>
+            </a:r>
+            <a:r>
+              <a:rPr lang="gu-IN" dirty="0" smtClean="0"/>
+              <a:t>ist માંથી નામ શોધવા માટે.</a:t>
+            </a:r>
+          </a:p>
+          <a:p>
+            <a:pPr marL="342900" indent="-342900">
+              <a:lnSpc>
+                <a:spcPct val="150000"/>
+              </a:lnSpc>
+              <a:buFont typeface="+mj-lt"/>
+              <a:buAutoNum type="arabicPeriod"/>
+            </a:pPr>
+            <a:r>
+              <a:rPr lang="gu-IN" dirty="0" smtClean="0"/>
+              <a:t>છેલ્લા ૭ દિવસ ની </a:t>
+            </a:r>
+            <a:r>
+              <a:rPr lang="en-IN" dirty="0"/>
+              <a:t>Inquiries</a:t>
+            </a:r>
+            <a:r>
+              <a:rPr lang="gu-IN" b="1" dirty="0"/>
+              <a:t> </a:t>
+            </a:r>
+            <a:r>
+              <a:rPr lang="gu-IN" dirty="0" smtClean="0"/>
+              <a:t>નું list</a:t>
+            </a:r>
+            <a:r>
+              <a:rPr lang="gu-IN" b="1" dirty="0" smtClean="0"/>
+              <a:t> </a:t>
+            </a:r>
+            <a:r>
+              <a:rPr lang="gu-IN" dirty="0"/>
+              <a:t>દર્શાવે છે.</a:t>
+            </a:r>
+          </a:p>
+          <a:p>
+            <a:pPr marL="342900" indent="-342900">
+              <a:lnSpc>
+                <a:spcPct val="150000"/>
+              </a:lnSpc>
+              <a:buFont typeface="+mj-lt"/>
+              <a:buAutoNum type="arabicPeriod"/>
+            </a:pPr>
+            <a:r>
+              <a:rPr lang="gu-IN" dirty="0" smtClean="0"/>
+              <a:t> </a:t>
+            </a:r>
+            <a:r>
+              <a:rPr lang="en-IN" dirty="0"/>
+              <a:t>L</a:t>
+            </a:r>
+            <a:r>
+              <a:rPr lang="gu-IN" dirty="0"/>
+              <a:t>ist માંથી નામ શોધવા માટે</a:t>
+            </a:r>
+            <a:r>
+              <a:rPr lang="gu-IN" dirty="0" smtClean="0"/>
+              <a:t>.</a:t>
+            </a:r>
+            <a:endParaRPr lang="gu-IN" dirty="0"/>
           </a:p>
         </p:txBody>
       </p:sp>
@@ -7439,6 +7729,1984 @@
     <p:extLst>
       <p:ext uri="{BB962C8B-B14F-4D97-AF65-F5344CB8AC3E}">
         <p14:creationId xmlns:p14="http://schemas.microsoft.com/office/powerpoint/2010/main" val="1857241282"/>
+      </p:ext>
+    </p:extLst>
+  </p:cSld>
+  <p:clrMapOvr>
+    <a:masterClrMapping/>
+  </p:clrMapOvr>
+</p:sld>
+</file>
+
+<file path=ppt/slides/slide5.xml><?xml version="1.0" encoding="utf-8"?>
+<p:sld xmlns:a="http://schemas.openxmlformats.org/drawingml/2006/main" xmlns:r="http://schemas.openxmlformats.org/officeDocument/2006/relationships" xmlns:p="http://schemas.openxmlformats.org/presentationml/2006/main">
+  <p:cSld>
+    <p:spTree>
+      <p:nvGrpSpPr>
+        <p:cNvPr id="1" name=""/>
+        <p:cNvGrpSpPr/>
+        <p:nvPr/>
+      </p:nvGrpSpPr>
+      <p:grpSpPr>
+        <a:xfrm>
+          <a:off x="0" y="0"/>
+          <a:ext cx="0" cy="0"/>
+          <a:chOff x="0" y="0"/>
+          <a:chExt cx="0" cy="0"/>
+        </a:xfrm>
+      </p:grpSpPr>
+      <p:sp>
+        <p:nvSpPr>
+          <p:cNvPr id="4" name="Rectangle 3"/>
+          <p:cNvSpPr/>
+          <p:nvPr/>
+        </p:nvSpPr>
+        <p:spPr>
+          <a:xfrm>
+            <a:off x="220435" y="118000"/>
+            <a:ext cx="11895364" cy="923330"/>
+          </a:xfrm>
+          <a:prstGeom prst="rect">
+            <a:avLst/>
+          </a:prstGeom>
+          <a:noFill/>
+        </p:spPr>
+        <p:txBody>
+          <a:bodyPr wrap="square" lIns="91440" tIns="45720" rIns="91440" bIns="45720">
+            <a:spAutoFit/>
+          </a:bodyPr>
+          <a:lstStyle/>
+          <a:p>
+            <a:pPr algn="ctr"/>
+            <a:r>
+              <a:rPr lang="en-US" sz="5400" b="1" dirty="0" smtClean="0">
+                <a:ln w="12700">
+                  <a:solidFill>
+                    <a:schemeClr val="accent1"/>
+                  </a:solidFill>
+                  <a:prstDash val="solid"/>
+                </a:ln>
+                <a:pattFill prst="pct50">
+                  <a:fgClr>
+                    <a:schemeClr val="accent1"/>
+                  </a:fgClr>
+                  <a:bgClr>
+                    <a:schemeClr val="accent1">
+                      <a:lumMod val="20000"/>
+                      <a:lumOff val="80000"/>
+                    </a:schemeClr>
+                  </a:bgClr>
+                </a:pattFill>
+              </a:rPr>
+              <a:t>Expense</a:t>
+            </a:r>
+            <a:endParaRPr lang="en-US" sz="5400" b="1" dirty="0">
+              <a:ln w="12700">
+                <a:solidFill>
+                  <a:schemeClr val="accent1"/>
+                </a:solidFill>
+                <a:prstDash val="solid"/>
+              </a:ln>
+              <a:pattFill prst="pct50">
+                <a:fgClr>
+                  <a:schemeClr val="accent1"/>
+                </a:fgClr>
+                <a:bgClr>
+                  <a:schemeClr val="accent1">
+                    <a:lumMod val="20000"/>
+                    <a:lumOff val="80000"/>
+                  </a:schemeClr>
+                </a:bgClr>
+              </a:pattFill>
+            </a:endParaRPr>
+          </a:p>
+        </p:txBody>
+      </p:sp>
+      <p:pic>
+        <p:nvPicPr>
+          <p:cNvPr id="2" name="Picture 1"/>
+          <p:cNvPicPr>
+            <a:picLocks noChangeAspect="1"/>
+          </p:cNvPicPr>
+          <p:nvPr/>
+        </p:nvPicPr>
+        <p:blipFill>
+          <a:blip r:embed="rId2">
+            <a:extLst>
+              <a:ext uri="{28A0092B-C50C-407E-A947-70E740481C1C}">
+                <a14:useLocalDpi xmlns:a14="http://schemas.microsoft.com/office/drawing/2010/main" val="0"/>
+              </a:ext>
+            </a:extLst>
+          </a:blip>
+          <a:stretch>
+            <a:fillRect/>
+          </a:stretch>
+        </p:blipFill>
+        <p:spPr>
+          <a:xfrm>
+            <a:off x="658259" y="1279083"/>
+            <a:ext cx="11019715" cy="5244182"/>
+          </a:xfrm>
+          <a:prstGeom prst="rect">
+            <a:avLst/>
+          </a:prstGeom>
+        </p:spPr>
+      </p:pic>
+      <p:cxnSp>
+        <p:nvCxnSpPr>
+          <p:cNvPr id="8" name="Straight Arrow Connector 7"/>
+          <p:cNvCxnSpPr/>
+          <p:nvPr/>
+        </p:nvCxnSpPr>
+        <p:spPr>
+          <a:xfrm flipH="1">
+            <a:off x="4057650" y="1877778"/>
+            <a:ext cx="228600" cy="310243"/>
+          </a:xfrm>
+          <a:prstGeom prst="straightConnector1">
+            <a:avLst/>
+          </a:prstGeom>
+          <a:ln>
+            <a:tailEnd type="triangle"/>
+          </a:ln>
+        </p:spPr>
+        <p:style>
+          <a:lnRef idx="3">
+            <a:schemeClr val="accent6"/>
+          </a:lnRef>
+          <a:fillRef idx="0">
+            <a:schemeClr val="accent6"/>
+          </a:fillRef>
+          <a:effectRef idx="2">
+            <a:schemeClr val="accent6"/>
+          </a:effectRef>
+          <a:fontRef idx="minor">
+            <a:schemeClr val="tx1"/>
+          </a:fontRef>
+        </p:style>
+      </p:cxnSp>
+      <p:cxnSp>
+        <p:nvCxnSpPr>
+          <p:cNvPr id="9" name="Straight Arrow Connector 8"/>
+          <p:cNvCxnSpPr/>
+          <p:nvPr/>
+        </p:nvCxnSpPr>
+        <p:spPr>
+          <a:xfrm flipH="1">
+            <a:off x="4210050" y="4136565"/>
+            <a:ext cx="228600" cy="310243"/>
+          </a:xfrm>
+          <a:prstGeom prst="straightConnector1">
+            <a:avLst/>
+          </a:prstGeom>
+          <a:ln>
+            <a:tailEnd type="triangle"/>
+          </a:ln>
+        </p:spPr>
+        <p:style>
+          <a:lnRef idx="3">
+            <a:schemeClr val="accent6"/>
+          </a:lnRef>
+          <a:fillRef idx="0">
+            <a:schemeClr val="accent6"/>
+          </a:fillRef>
+          <a:effectRef idx="2">
+            <a:schemeClr val="accent6"/>
+          </a:effectRef>
+          <a:fontRef idx="minor">
+            <a:schemeClr val="tx1"/>
+          </a:fontRef>
+        </p:style>
+      </p:cxnSp>
+      <p:cxnSp>
+        <p:nvCxnSpPr>
+          <p:cNvPr id="10" name="Straight Arrow Connector 9"/>
+          <p:cNvCxnSpPr/>
+          <p:nvPr/>
+        </p:nvCxnSpPr>
+        <p:spPr>
+          <a:xfrm flipH="1">
+            <a:off x="5064577" y="4876792"/>
+            <a:ext cx="228600" cy="310243"/>
+          </a:xfrm>
+          <a:prstGeom prst="straightConnector1">
+            <a:avLst/>
+          </a:prstGeom>
+          <a:ln>
+            <a:tailEnd type="triangle"/>
+          </a:ln>
+        </p:spPr>
+        <p:style>
+          <a:lnRef idx="3">
+            <a:schemeClr val="accent6"/>
+          </a:lnRef>
+          <a:fillRef idx="0">
+            <a:schemeClr val="accent6"/>
+          </a:fillRef>
+          <a:effectRef idx="2">
+            <a:schemeClr val="accent6"/>
+          </a:effectRef>
+          <a:fontRef idx="minor">
+            <a:schemeClr val="tx1"/>
+          </a:fontRef>
+        </p:style>
+      </p:cxnSp>
+      <p:cxnSp>
+        <p:nvCxnSpPr>
+          <p:cNvPr id="11" name="Straight Arrow Connector 10"/>
+          <p:cNvCxnSpPr/>
+          <p:nvPr/>
+        </p:nvCxnSpPr>
+        <p:spPr>
+          <a:xfrm>
+            <a:off x="2881992" y="5178871"/>
+            <a:ext cx="367389" cy="13608"/>
+          </a:xfrm>
+          <a:prstGeom prst="straightConnector1">
+            <a:avLst/>
+          </a:prstGeom>
+          <a:ln>
+            <a:tailEnd type="triangle"/>
+          </a:ln>
+        </p:spPr>
+        <p:style>
+          <a:lnRef idx="3">
+            <a:schemeClr val="accent6"/>
+          </a:lnRef>
+          <a:fillRef idx="0">
+            <a:schemeClr val="accent6"/>
+          </a:fillRef>
+          <a:effectRef idx="2">
+            <a:schemeClr val="accent6"/>
+          </a:effectRef>
+          <a:fontRef idx="minor">
+            <a:schemeClr val="tx1"/>
+          </a:fontRef>
+        </p:style>
+      </p:cxnSp>
+      <p:cxnSp>
+        <p:nvCxnSpPr>
+          <p:cNvPr id="13" name="Straight Arrow Connector 12"/>
+          <p:cNvCxnSpPr/>
+          <p:nvPr/>
+        </p:nvCxnSpPr>
+        <p:spPr>
+          <a:xfrm flipH="1">
+            <a:off x="7761841" y="3826322"/>
+            <a:ext cx="228600" cy="310243"/>
+          </a:xfrm>
+          <a:prstGeom prst="straightConnector1">
+            <a:avLst/>
+          </a:prstGeom>
+          <a:ln>
+            <a:tailEnd type="triangle"/>
+          </a:ln>
+        </p:spPr>
+        <p:style>
+          <a:lnRef idx="3">
+            <a:schemeClr val="accent6"/>
+          </a:lnRef>
+          <a:fillRef idx="0">
+            <a:schemeClr val="accent6"/>
+          </a:fillRef>
+          <a:effectRef idx="2">
+            <a:schemeClr val="accent6"/>
+          </a:effectRef>
+          <a:fontRef idx="minor">
+            <a:schemeClr val="tx1"/>
+          </a:fontRef>
+        </p:style>
+      </p:cxnSp>
+      <p:cxnSp>
+        <p:nvCxnSpPr>
+          <p:cNvPr id="14" name="Straight Arrow Connector 13"/>
+          <p:cNvCxnSpPr/>
+          <p:nvPr/>
+        </p:nvCxnSpPr>
+        <p:spPr>
+          <a:xfrm flipH="1">
+            <a:off x="4171950" y="2552703"/>
+            <a:ext cx="228600" cy="310243"/>
+          </a:xfrm>
+          <a:prstGeom prst="straightConnector1">
+            <a:avLst/>
+          </a:prstGeom>
+          <a:ln>
+            <a:tailEnd type="triangle"/>
+          </a:ln>
+        </p:spPr>
+        <p:style>
+          <a:lnRef idx="3">
+            <a:schemeClr val="accent6"/>
+          </a:lnRef>
+          <a:fillRef idx="0">
+            <a:schemeClr val="accent6"/>
+          </a:fillRef>
+          <a:effectRef idx="2">
+            <a:schemeClr val="accent6"/>
+          </a:effectRef>
+          <a:fontRef idx="minor">
+            <a:schemeClr val="tx1"/>
+          </a:fontRef>
+        </p:style>
+      </p:cxnSp>
+      <p:cxnSp>
+        <p:nvCxnSpPr>
+          <p:cNvPr id="15" name="Straight Arrow Connector 14"/>
+          <p:cNvCxnSpPr/>
+          <p:nvPr/>
+        </p:nvCxnSpPr>
+        <p:spPr>
+          <a:xfrm flipH="1">
+            <a:off x="5826579" y="2552702"/>
+            <a:ext cx="228600" cy="310243"/>
+          </a:xfrm>
+          <a:prstGeom prst="straightConnector1">
+            <a:avLst/>
+          </a:prstGeom>
+          <a:ln>
+            <a:tailEnd type="triangle"/>
+          </a:ln>
+        </p:spPr>
+        <p:style>
+          <a:lnRef idx="3">
+            <a:schemeClr val="accent6"/>
+          </a:lnRef>
+          <a:fillRef idx="0">
+            <a:schemeClr val="accent6"/>
+          </a:fillRef>
+          <a:effectRef idx="2">
+            <a:schemeClr val="accent6"/>
+          </a:effectRef>
+          <a:fontRef idx="minor">
+            <a:schemeClr val="tx1"/>
+          </a:fontRef>
+        </p:style>
+      </p:cxnSp>
+      <p:cxnSp>
+        <p:nvCxnSpPr>
+          <p:cNvPr id="16" name="Straight Arrow Connector 15"/>
+          <p:cNvCxnSpPr/>
+          <p:nvPr/>
+        </p:nvCxnSpPr>
+        <p:spPr>
+          <a:xfrm flipH="1">
+            <a:off x="8118022" y="2552702"/>
+            <a:ext cx="228600" cy="310243"/>
+          </a:xfrm>
+          <a:prstGeom prst="straightConnector1">
+            <a:avLst/>
+          </a:prstGeom>
+          <a:ln>
+            <a:tailEnd type="triangle"/>
+          </a:ln>
+        </p:spPr>
+        <p:style>
+          <a:lnRef idx="3">
+            <a:schemeClr val="accent6"/>
+          </a:lnRef>
+          <a:fillRef idx="0">
+            <a:schemeClr val="accent6"/>
+          </a:fillRef>
+          <a:effectRef idx="2">
+            <a:schemeClr val="accent6"/>
+          </a:effectRef>
+          <a:fontRef idx="minor">
+            <a:schemeClr val="tx1"/>
+          </a:fontRef>
+        </p:style>
+      </p:cxnSp>
+      <p:cxnSp>
+        <p:nvCxnSpPr>
+          <p:cNvPr id="17" name="Straight Arrow Connector 16"/>
+          <p:cNvCxnSpPr/>
+          <p:nvPr/>
+        </p:nvCxnSpPr>
+        <p:spPr>
+          <a:xfrm flipH="1">
+            <a:off x="9897998" y="2552702"/>
+            <a:ext cx="228600" cy="310243"/>
+          </a:xfrm>
+          <a:prstGeom prst="straightConnector1">
+            <a:avLst/>
+          </a:prstGeom>
+          <a:ln>
+            <a:tailEnd type="triangle"/>
+          </a:ln>
+        </p:spPr>
+        <p:style>
+          <a:lnRef idx="3">
+            <a:schemeClr val="accent6"/>
+          </a:lnRef>
+          <a:fillRef idx="0">
+            <a:schemeClr val="accent6"/>
+          </a:fillRef>
+          <a:effectRef idx="2">
+            <a:schemeClr val="accent6"/>
+          </a:effectRef>
+          <a:fontRef idx="minor">
+            <a:schemeClr val="tx1"/>
+          </a:fontRef>
+        </p:style>
+      </p:cxnSp>
+      <p:cxnSp>
+        <p:nvCxnSpPr>
+          <p:cNvPr id="18" name="Straight Arrow Connector 17"/>
+          <p:cNvCxnSpPr/>
+          <p:nvPr/>
+        </p:nvCxnSpPr>
+        <p:spPr>
+          <a:xfrm flipV="1">
+            <a:off x="10229850" y="3007181"/>
+            <a:ext cx="146958" cy="340177"/>
+          </a:xfrm>
+          <a:prstGeom prst="straightConnector1">
+            <a:avLst/>
+          </a:prstGeom>
+          <a:ln>
+            <a:tailEnd type="triangle"/>
+          </a:ln>
+        </p:spPr>
+        <p:style>
+          <a:lnRef idx="3">
+            <a:schemeClr val="accent6"/>
+          </a:lnRef>
+          <a:fillRef idx="0">
+            <a:schemeClr val="accent6"/>
+          </a:fillRef>
+          <a:effectRef idx="2">
+            <a:schemeClr val="accent6"/>
+          </a:effectRef>
+          <a:fontRef idx="minor">
+            <a:schemeClr val="tx1"/>
+          </a:fontRef>
+        </p:style>
+      </p:cxnSp>
+      <p:sp>
+        <p:nvSpPr>
+          <p:cNvPr id="20" name="Rectangle 19"/>
+          <p:cNvSpPr/>
+          <p:nvPr/>
+        </p:nvSpPr>
+        <p:spPr>
+          <a:xfrm>
+            <a:off x="4286250" y="1600193"/>
+            <a:ext cx="326571" cy="277585"/>
+          </a:xfrm>
+          <a:prstGeom prst="rect">
+            <a:avLst/>
+          </a:prstGeom>
+          <a:solidFill>
+            <a:schemeClr val="tx1"/>
+          </a:solidFill>
+          <a:ln>
+            <a:solidFill>
+              <a:schemeClr val="accent6"/>
+            </a:solidFill>
+          </a:ln>
+        </p:spPr>
+        <p:style>
+          <a:lnRef idx="2">
+            <a:schemeClr val="accent1">
+              <a:shade val="50000"/>
+            </a:schemeClr>
+          </a:lnRef>
+          <a:fillRef idx="1">
+            <a:schemeClr val="accent1"/>
+          </a:fillRef>
+          <a:effectRef idx="0">
+            <a:schemeClr val="accent1"/>
+          </a:effectRef>
+          <a:fontRef idx="minor">
+            <a:schemeClr val="lt1"/>
+          </a:fontRef>
+        </p:style>
+        <p:txBody>
+          <a:bodyPr rtlCol="0" anchor="ctr"/>
+          <a:lstStyle/>
+          <a:p>
+            <a:pPr algn="ctr"/>
+            <a:endParaRPr lang="en-IN">
+              <a:ln>
+                <a:solidFill>
+                  <a:schemeClr val="accent6"/>
+                </a:solidFill>
+              </a:ln>
+              <a:solidFill>
+                <a:schemeClr val="tx1"/>
+              </a:solidFill>
+            </a:endParaRPr>
+          </a:p>
+        </p:txBody>
+      </p:sp>
+      <p:sp>
+        <p:nvSpPr>
+          <p:cNvPr id="21" name="Rectangle 20"/>
+          <p:cNvSpPr/>
+          <p:nvPr/>
+        </p:nvSpPr>
+        <p:spPr>
+          <a:xfrm>
+            <a:off x="4405994" y="2266939"/>
+            <a:ext cx="326571" cy="277585"/>
+          </a:xfrm>
+          <a:prstGeom prst="rect">
+            <a:avLst/>
+          </a:prstGeom>
+          <a:solidFill>
+            <a:schemeClr val="tx1"/>
+          </a:solidFill>
+          <a:ln>
+            <a:solidFill>
+              <a:schemeClr val="accent6"/>
+            </a:solidFill>
+          </a:ln>
+        </p:spPr>
+        <p:style>
+          <a:lnRef idx="2">
+            <a:schemeClr val="accent1">
+              <a:shade val="50000"/>
+            </a:schemeClr>
+          </a:lnRef>
+          <a:fillRef idx="1">
+            <a:schemeClr val="accent1"/>
+          </a:fillRef>
+          <a:effectRef idx="0">
+            <a:schemeClr val="accent1"/>
+          </a:effectRef>
+          <a:fontRef idx="minor">
+            <a:schemeClr val="lt1"/>
+          </a:fontRef>
+        </p:style>
+        <p:txBody>
+          <a:bodyPr rtlCol="0" anchor="ctr"/>
+          <a:lstStyle/>
+          <a:p>
+            <a:pPr algn="ctr"/>
+            <a:endParaRPr lang="en-IN">
+              <a:ln>
+                <a:solidFill>
+                  <a:schemeClr val="accent6"/>
+                </a:solidFill>
+              </a:ln>
+              <a:solidFill>
+                <a:schemeClr val="tx1"/>
+              </a:solidFill>
+            </a:endParaRPr>
+          </a:p>
+        </p:txBody>
+      </p:sp>
+      <p:sp>
+        <p:nvSpPr>
+          <p:cNvPr id="22" name="Rectangle 21"/>
+          <p:cNvSpPr/>
+          <p:nvPr/>
+        </p:nvSpPr>
+        <p:spPr>
+          <a:xfrm>
+            <a:off x="6076953" y="2264219"/>
+            <a:ext cx="326571" cy="277585"/>
+          </a:xfrm>
+          <a:prstGeom prst="rect">
+            <a:avLst/>
+          </a:prstGeom>
+          <a:solidFill>
+            <a:schemeClr val="tx1"/>
+          </a:solidFill>
+          <a:ln>
+            <a:solidFill>
+              <a:schemeClr val="accent6"/>
+            </a:solidFill>
+          </a:ln>
+        </p:spPr>
+        <p:style>
+          <a:lnRef idx="2">
+            <a:schemeClr val="accent1">
+              <a:shade val="50000"/>
+            </a:schemeClr>
+          </a:lnRef>
+          <a:fillRef idx="1">
+            <a:schemeClr val="accent1"/>
+          </a:fillRef>
+          <a:effectRef idx="0">
+            <a:schemeClr val="accent1"/>
+          </a:effectRef>
+          <a:fontRef idx="minor">
+            <a:schemeClr val="lt1"/>
+          </a:fontRef>
+        </p:style>
+        <p:txBody>
+          <a:bodyPr rtlCol="0" anchor="ctr"/>
+          <a:lstStyle/>
+          <a:p>
+            <a:pPr algn="ctr"/>
+            <a:endParaRPr lang="en-IN">
+              <a:ln>
+                <a:solidFill>
+                  <a:schemeClr val="accent6"/>
+                </a:solidFill>
+              </a:ln>
+              <a:solidFill>
+                <a:schemeClr val="tx1"/>
+              </a:solidFill>
+            </a:endParaRPr>
+          </a:p>
+        </p:txBody>
+      </p:sp>
+      <p:sp>
+        <p:nvSpPr>
+          <p:cNvPr id="23" name="Rectangle 22"/>
+          <p:cNvSpPr/>
+          <p:nvPr/>
+        </p:nvSpPr>
+        <p:spPr>
+          <a:xfrm>
+            <a:off x="8343903" y="2277830"/>
+            <a:ext cx="326571" cy="277585"/>
+          </a:xfrm>
+          <a:prstGeom prst="rect">
+            <a:avLst/>
+          </a:prstGeom>
+          <a:solidFill>
+            <a:schemeClr val="tx1"/>
+          </a:solidFill>
+          <a:ln>
+            <a:solidFill>
+              <a:schemeClr val="accent6"/>
+            </a:solidFill>
+          </a:ln>
+        </p:spPr>
+        <p:style>
+          <a:lnRef idx="2">
+            <a:schemeClr val="accent1">
+              <a:shade val="50000"/>
+            </a:schemeClr>
+          </a:lnRef>
+          <a:fillRef idx="1">
+            <a:schemeClr val="accent1"/>
+          </a:fillRef>
+          <a:effectRef idx="0">
+            <a:schemeClr val="accent1"/>
+          </a:effectRef>
+          <a:fontRef idx="minor">
+            <a:schemeClr val="lt1"/>
+          </a:fontRef>
+        </p:style>
+        <p:txBody>
+          <a:bodyPr rtlCol="0" anchor="ctr"/>
+          <a:lstStyle/>
+          <a:p>
+            <a:pPr algn="ctr"/>
+            <a:endParaRPr lang="en-IN">
+              <a:ln>
+                <a:solidFill>
+                  <a:schemeClr val="accent6"/>
+                </a:solidFill>
+              </a:ln>
+              <a:solidFill>
+                <a:schemeClr val="tx1"/>
+              </a:solidFill>
+            </a:endParaRPr>
+          </a:p>
+        </p:txBody>
+      </p:sp>
+      <p:sp>
+        <p:nvSpPr>
+          <p:cNvPr id="24" name="Rectangle 23"/>
+          <p:cNvSpPr/>
+          <p:nvPr/>
+        </p:nvSpPr>
+        <p:spPr>
+          <a:xfrm>
+            <a:off x="10129164" y="2283277"/>
+            <a:ext cx="326571" cy="277585"/>
+          </a:xfrm>
+          <a:prstGeom prst="rect">
+            <a:avLst/>
+          </a:prstGeom>
+          <a:solidFill>
+            <a:schemeClr val="tx1"/>
+          </a:solidFill>
+          <a:ln>
+            <a:solidFill>
+              <a:schemeClr val="accent6"/>
+            </a:solidFill>
+          </a:ln>
+        </p:spPr>
+        <p:style>
+          <a:lnRef idx="2">
+            <a:schemeClr val="accent1">
+              <a:shade val="50000"/>
+            </a:schemeClr>
+          </a:lnRef>
+          <a:fillRef idx="1">
+            <a:schemeClr val="accent1"/>
+          </a:fillRef>
+          <a:effectRef idx="0">
+            <a:schemeClr val="accent1"/>
+          </a:effectRef>
+          <a:fontRef idx="minor">
+            <a:schemeClr val="lt1"/>
+          </a:fontRef>
+        </p:style>
+        <p:txBody>
+          <a:bodyPr rtlCol="0" anchor="ctr"/>
+          <a:lstStyle/>
+          <a:p>
+            <a:pPr algn="ctr"/>
+            <a:endParaRPr lang="en-IN">
+              <a:ln>
+                <a:solidFill>
+                  <a:schemeClr val="accent6"/>
+                </a:solidFill>
+              </a:ln>
+              <a:solidFill>
+                <a:schemeClr val="tx1"/>
+              </a:solidFill>
+            </a:endParaRPr>
+          </a:p>
+        </p:txBody>
+      </p:sp>
+      <p:sp>
+        <p:nvSpPr>
+          <p:cNvPr id="25" name="Rectangle 24"/>
+          <p:cNvSpPr/>
+          <p:nvPr/>
+        </p:nvSpPr>
+        <p:spPr>
+          <a:xfrm>
+            <a:off x="9946831" y="3341914"/>
+            <a:ext cx="326571" cy="277585"/>
+          </a:xfrm>
+          <a:prstGeom prst="rect">
+            <a:avLst/>
+          </a:prstGeom>
+          <a:solidFill>
+            <a:schemeClr val="tx1"/>
+          </a:solidFill>
+          <a:ln>
+            <a:solidFill>
+              <a:schemeClr val="accent6"/>
+            </a:solidFill>
+          </a:ln>
+        </p:spPr>
+        <p:style>
+          <a:lnRef idx="2">
+            <a:schemeClr val="accent1">
+              <a:shade val="50000"/>
+            </a:schemeClr>
+          </a:lnRef>
+          <a:fillRef idx="1">
+            <a:schemeClr val="accent1"/>
+          </a:fillRef>
+          <a:effectRef idx="0">
+            <a:schemeClr val="accent1"/>
+          </a:effectRef>
+          <a:fontRef idx="minor">
+            <a:schemeClr val="lt1"/>
+          </a:fontRef>
+        </p:style>
+        <p:txBody>
+          <a:bodyPr rtlCol="0" anchor="ctr"/>
+          <a:lstStyle/>
+          <a:p>
+            <a:pPr algn="ctr"/>
+            <a:endParaRPr lang="en-IN">
+              <a:ln>
+                <a:solidFill>
+                  <a:schemeClr val="accent6"/>
+                </a:solidFill>
+              </a:ln>
+              <a:solidFill>
+                <a:schemeClr val="tx1"/>
+              </a:solidFill>
+            </a:endParaRPr>
+          </a:p>
+        </p:txBody>
+      </p:sp>
+      <p:sp>
+        <p:nvSpPr>
+          <p:cNvPr id="26" name="Rectangle 25"/>
+          <p:cNvSpPr/>
+          <p:nvPr/>
+        </p:nvSpPr>
+        <p:spPr>
+          <a:xfrm>
+            <a:off x="7886706" y="3535134"/>
+            <a:ext cx="326571" cy="277585"/>
+          </a:xfrm>
+          <a:prstGeom prst="rect">
+            <a:avLst/>
+          </a:prstGeom>
+          <a:solidFill>
+            <a:schemeClr val="tx1"/>
+          </a:solidFill>
+          <a:ln>
+            <a:solidFill>
+              <a:schemeClr val="accent6"/>
+            </a:solidFill>
+          </a:ln>
+        </p:spPr>
+        <p:style>
+          <a:lnRef idx="2">
+            <a:schemeClr val="accent1">
+              <a:shade val="50000"/>
+            </a:schemeClr>
+          </a:lnRef>
+          <a:fillRef idx="1">
+            <a:schemeClr val="accent1"/>
+          </a:fillRef>
+          <a:effectRef idx="0">
+            <a:schemeClr val="accent1"/>
+          </a:effectRef>
+          <a:fontRef idx="minor">
+            <a:schemeClr val="lt1"/>
+          </a:fontRef>
+        </p:style>
+        <p:txBody>
+          <a:bodyPr rtlCol="0" anchor="ctr"/>
+          <a:lstStyle/>
+          <a:p>
+            <a:pPr algn="ctr"/>
+            <a:endParaRPr lang="en-IN">
+              <a:ln>
+                <a:solidFill>
+                  <a:schemeClr val="accent6"/>
+                </a:solidFill>
+              </a:ln>
+              <a:solidFill>
+                <a:schemeClr val="tx1"/>
+              </a:solidFill>
+            </a:endParaRPr>
+          </a:p>
+        </p:txBody>
+      </p:sp>
+      <p:sp>
+        <p:nvSpPr>
+          <p:cNvPr id="27" name="Rectangle 26"/>
+          <p:cNvSpPr/>
+          <p:nvPr/>
+        </p:nvSpPr>
+        <p:spPr>
+          <a:xfrm>
+            <a:off x="5214260" y="4601932"/>
+            <a:ext cx="326571" cy="277585"/>
+          </a:xfrm>
+          <a:prstGeom prst="rect">
+            <a:avLst/>
+          </a:prstGeom>
+          <a:solidFill>
+            <a:schemeClr val="tx1"/>
+          </a:solidFill>
+          <a:ln>
+            <a:solidFill>
+              <a:schemeClr val="accent6"/>
+            </a:solidFill>
+          </a:ln>
+        </p:spPr>
+        <p:style>
+          <a:lnRef idx="2">
+            <a:schemeClr val="accent1">
+              <a:shade val="50000"/>
+            </a:schemeClr>
+          </a:lnRef>
+          <a:fillRef idx="1">
+            <a:schemeClr val="accent1"/>
+          </a:fillRef>
+          <a:effectRef idx="0">
+            <a:schemeClr val="accent1"/>
+          </a:effectRef>
+          <a:fontRef idx="minor">
+            <a:schemeClr val="lt1"/>
+          </a:fontRef>
+        </p:style>
+        <p:txBody>
+          <a:bodyPr rtlCol="0" anchor="ctr"/>
+          <a:lstStyle/>
+          <a:p>
+            <a:pPr algn="ctr"/>
+            <a:endParaRPr lang="en-IN">
+              <a:ln>
+                <a:solidFill>
+                  <a:schemeClr val="accent6"/>
+                </a:solidFill>
+              </a:ln>
+              <a:solidFill>
+                <a:schemeClr val="tx1"/>
+              </a:solidFill>
+            </a:endParaRPr>
+          </a:p>
+        </p:txBody>
+      </p:sp>
+      <p:sp>
+        <p:nvSpPr>
+          <p:cNvPr id="28" name="Rectangle 27"/>
+          <p:cNvSpPr/>
+          <p:nvPr/>
+        </p:nvSpPr>
+        <p:spPr>
+          <a:xfrm>
+            <a:off x="4264481" y="3872590"/>
+            <a:ext cx="326571" cy="277585"/>
+          </a:xfrm>
+          <a:prstGeom prst="rect">
+            <a:avLst/>
+          </a:prstGeom>
+          <a:solidFill>
+            <a:schemeClr val="tx1"/>
+          </a:solidFill>
+          <a:ln>
+            <a:solidFill>
+              <a:schemeClr val="accent6"/>
+            </a:solidFill>
+          </a:ln>
+        </p:spPr>
+        <p:style>
+          <a:lnRef idx="2">
+            <a:schemeClr val="accent1">
+              <a:shade val="50000"/>
+            </a:schemeClr>
+          </a:lnRef>
+          <a:fillRef idx="1">
+            <a:schemeClr val="accent1"/>
+          </a:fillRef>
+          <a:effectRef idx="0">
+            <a:schemeClr val="accent1"/>
+          </a:effectRef>
+          <a:fontRef idx="minor">
+            <a:schemeClr val="lt1"/>
+          </a:fontRef>
+        </p:style>
+        <p:txBody>
+          <a:bodyPr rtlCol="0" anchor="ctr"/>
+          <a:lstStyle/>
+          <a:p>
+            <a:pPr algn="ctr"/>
+            <a:endParaRPr lang="en-IN">
+              <a:ln>
+                <a:solidFill>
+                  <a:schemeClr val="accent6"/>
+                </a:solidFill>
+              </a:ln>
+              <a:solidFill>
+                <a:schemeClr val="tx1"/>
+              </a:solidFill>
+            </a:endParaRPr>
+          </a:p>
+        </p:txBody>
+      </p:sp>
+      <p:sp>
+        <p:nvSpPr>
+          <p:cNvPr id="29" name="Rectangle 28"/>
+          <p:cNvSpPr/>
+          <p:nvPr/>
+        </p:nvSpPr>
+        <p:spPr>
+          <a:xfrm>
+            <a:off x="2555419" y="5012864"/>
+            <a:ext cx="326571" cy="277585"/>
+          </a:xfrm>
+          <a:prstGeom prst="rect">
+            <a:avLst/>
+          </a:prstGeom>
+          <a:solidFill>
+            <a:schemeClr val="tx1"/>
+          </a:solidFill>
+          <a:ln>
+            <a:solidFill>
+              <a:schemeClr val="accent6"/>
+            </a:solidFill>
+          </a:ln>
+        </p:spPr>
+        <p:style>
+          <a:lnRef idx="2">
+            <a:schemeClr val="accent1">
+              <a:shade val="50000"/>
+            </a:schemeClr>
+          </a:lnRef>
+          <a:fillRef idx="1">
+            <a:schemeClr val="accent1"/>
+          </a:fillRef>
+          <a:effectRef idx="0">
+            <a:schemeClr val="accent1"/>
+          </a:effectRef>
+          <a:fontRef idx="minor">
+            <a:schemeClr val="lt1"/>
+          </a:fontRef>
+        </p:style>
+        <p:txBody>
+          <a:bodyPr rtlCol="0" anchor="ctr"/>
+          <a:lstStyle/>
+          <a:p>
+            <a:pPr algn="ctr"/>
+            <a:endParaRPr lang="en-IN">
+              <a:ln>
+                <a:solidFill>
+                  <a:schemeClr val="accent6"/>
+                </a:solidFill>
+              </a:ln>
+              <a:solidFill>
+                <a:schemeClr val="tx1"/>
+              </a:solidFill>
+            </a:endParaRPr>
+          </a:p>
+        </p:txBody>
+      </p:sp>
+      <p:sp>
+        <p:nvSpPr>
+          <p:cNvPr id="31" name="TextBox 30"/>
+          <p:cNvSpPr txBox="1"/>
+          <p:nvPr/>
+        </p:nvSpPr>
+        <p:spPr>
+          <a:xfrm>
+            <a:off x="4278085" y="1561903"/>
+            <a:ext cx="326571" cy="369332"/>
+          </a:xfrm>
+          <a:prstGeom prst="rect">
+            <a:avLst/>
+          </a:prstGeom>
+          <a:noFill/>
+        </p:spPr>
+        <p:txBody>
+          <a:bodyPr wrap="square" rtlCol="0">
+            <a:spAutoFit/>
+          </a:bodyPr>
+          <a:lstStyle/>
+          <a:p>
+            <a:r>
+              <a:rPr lang="en-US" dirty="0" smtClean="0">
+                <a:solidFill>
+                  <a:schemeClr val="accent6"/>
+                </a:solidFill>
+              </a:rPr>
+              <a:t>6</a:t>
+            </a:r>
+            <a:endParaRPr lang="en-IN" dirty="0">
+              <a:solidFill>
+                <a:schemeClr val="accent6"/>
+              </a:solidFill>
+            </a:endParaRPr>
+          </a:p>
+        </p:txBody>
+      </p:sp>
+      <p:sp>
+        <p:nvSpPr>
+          <p:cNvPr id="32" name="TextBox 31"/>
+          <p:cNvSpPr txBox="1"/>
+          <p:nvPr/>
+        </p:nvSpPr>
+        <p:spPr>
+          <a:xfrm>
+            <a:off x="4405994" y="2226123"/>
+            <a:ext cx="326571" cy="369332"/>
+          </a:xfrm>
+          <a:prstGeom prst="rect">
+            <a:avLst/>
+          </a:prstGeom>
+          <a:noFill/>
+        </p:spPr>
+        <p:txBody>
+          <a:bodyPr wrap="square" rtlCol="0">
+            <a:spAutoFit/>
+          </a:bodyPr>
+          <a:lstStyle/>
+          <a:p>
+            <a:r>
+              <a:rPr lang="en-US" dirty="0" smtClean="0">
+                <a:solidFill>
+                  <a:schemeClr val="accent6"/>
+                </a:solidFill>
+              </a:rPr>
+              <a:t>7</a:t>
+            </a:r>
+            <a:endParaRPr lang="en-IN" dirty="0">
+              <a:solidFill>
+                <a:schemeClr val="accent6"/>
+              </a:solidFill>
+            </a:endParaRPr>
+          </a:p>
+        </p:txBody>
+      </p:sp>
+      <p:sp>
+        <p:nvSpPr>
+          <p:cNvPr id="33" name="TextBox 32"/>
+          <p:cNvSpPr txBox="1"/>
+          <p:nvPr/>
+        </p:nvSpPr>
+        <p:spPr>
+          <a:xfrm>
+            <a:off x="6085116" y="2207074"/>
+            <a:ext cx="326571" cy="369332"/>
+          </a:xfrm>
+          <a:prstGeom prst="rect">
+            <a:avLst/>
+          </a:prstGeom>
+          <a:noFill/>
+        </p:spPr>
+        <p:txBody>
+          <a:bodyPr wrap="square" rtlCol="0">
+            <a:spAutoFit/>
+          </a:bodyPr>
+          <a:lstStyle/>
+          <a:p>
+            <a:r>
+              <a:rPr lang="en-US" dirty="0" smtClean="0">
+                <a:solidFill>
+                  <a:schemeClr val="accent6"/>
+                </a:solidFill>
+              </a:rPr>
+              <a:t>8</a:t>
+            </a:r>
+            <a:endParaRPr lang="en-IN" dirty="0">
+              <a:solidFill>
+                <a:schemeClr val="accent6"/>
+              </a:solidFill>
+            </a:endParaRPr>
+          </a:p>
+        </p:txBody>
+      </p:sp>
+      <p:sp>
+        <p:nvSpPr>
+          <p:cNvPr id="34" name="TextBox 33"/>
+          <p:cNvSpPr txBox="1"/>
+          <p:nvPr/>
+        </p:nvSpPr>
+        <p:spPr>
+          <a:xfrm>
+            <a:off x="8343900" y="2228850"/>
+            <a:ext cx="326571" cy="369332"/>
+          </a:xfrm>
+          <a:prstGeom prst="rect">
+            <a:avLst/>
+          </a:prstGeom>
+          <a:noFill/>
+        </p:spPr>
+        <p:txBody>
+          <a:bodyPr wrap="square" rtlCol="0">
+            <a:spAutoFit/>
+          </a:bodyPr>
+          <a:lstStyle/>
+          <a:p>
+            <a:r>
+              <a:rPr lang="en-US" dirty="0" smtClean="0">
+                <a:solidFill>
+                  <a:schemeClr val="accent6"/>
+                </a:solidFill>
+              </a:rPr>
+              <a:t>9</a:t>
+            </a:r>
+            <a:endParaRPr lang="en-IN" dirty="0">
+              <a:solidFill>
+                <a:schemeClr val="accent6"/>
+              </a:solidFill>
+            </a:endParaRPr>
+          </a:p>
+        </p:txBody>
+      </p:sp>
+      <p:sp>
+        <p:nvSpPr>
+          <p:cNvPr id="35" name="TextBox 34"/>
+          <p:cNvSpPr txBox="1"/>
+          <p:nvPr/>
+        </p:nvSpPr>
+        <p:spPr>
+          <a:xfrm>
+            <a:off x="10063848" y="2234295"/>
+            <a:ext cx="473524" cy="369332"/>
+          </a:xfrm>
+          <a:prstGeom prst="rect">
+            <a:avLst/>
+          </a:prstGeom>
+          <a:noFill/>
+        </p:spPr>
+        <p:txBody>
+          <a:bodyPr wrap="square" rtlCol="0">
+            <a:spAutoFit/>
+          </a:bodyPr>
+          <a:lstStyle/>
+          <a:p>
+            <a:r>
+              <a:rPr lang="en-US" dirty="0" smtClean="0">
+                <a:solidFill>
+                  <a:schemeClr val="accent6"/>
+                </a:solidFill>
+              </a:rPr>
+              <a:t>10</a:t>
+            </a:r>
+            <a:endParaRPr lang="en-IN" dirty="0">
+              <a:solidFill>
+                <a:schemeClr val="accent6"/>
+              </a:solidFill>
+            </a:endParaRPr>
+          </a:p>
+        </p:txBody>
+      </p:sp>
+      <p:sp>
+        <p:nvSpPr>
+          <p:cNvPr id="36" name="TextBox 35"/>
+          <p:cNvSpPr txBox="1"/>
+          <p:nvPr/>
+        </p:nvSpPr>
+        <p:spPr>
+          <a:xfrm>
+            <a:off x="9881508" y="3292927"/>
+            <a:ext cx="508907" cy="369332"/>
+          </a:xfrm>
+          <a:prstGeom prst="rect">
+            <a:avLst/>
+          </a:prstGeom>
+          <a:noFill/>
+        </p:spPr>
+        <p:txBody>
+          <a:bodyPr wrap="square" rtlCol="0">
+            <a:spAutoFit/>
+          </a:bodyPr>
+          <a:lstStyle/>
+          <a:p>
+            <a:r>
+              <a:rPr lang="en-US" dirty="0" smtClean="0">
+                <a:solidFill>
+                  <a:schemeClr val="accent6"/>
+                </a:solidFill>
+              </a:rPr>
+              <a:t>11</a:t>
+            </a:r>
+            <a:endParaRPr lang="en-IN" dirty="0">
+              <a:solidFill>
+                <a:schemeClr val="accent6"/>
+              </a:solidFill>
+            </a:endParaRPr>
+          </a:p>
+        </p:txBody>
+      </p:sp>
+      <p:sp>
+        <p:nvSpPr>
+          <p:cNvPr id="37" name="TextBox 36"/>
+          <p:cNvSpPr txBox="1"/>
+          <p:nvPr/>
+        </p:nvSpPr>
+        <p:spPr>
+          <a:xfrm>
+            <a:off x="7878536" y="3486147"/>
+            <a:ext cx="326571" cy="369332"/>
+          </a:xfrm>
+          <a:prstGeom prst="rect">
+            <a:avLst/>
+          </a:prstGeom>
+          <a:noFill/>
+        </p:spPr>
+        <p:txBody>
+          <a:bodyPr wrap="square" rtlCol="0">
+            <a:spAutoFit/>
+          </a:bodyPr>
+          <a:lstStyle/>
+          <a:p>
+            <a:r>
+              <a:rPr lang="en-US" dirty="0" smtClean="0">
+                <a:solidFill>
+                  <a:schemeClr val="accent6"/>
+                </a:solidFill>
+              </a:rPr>
+              <a:t>5</a:t>
+            </a:r>
+            <a:endParaRPr lang="en-IN" dirty="0">
+              <a:solidFill>
+                <a:schemeClr val="accent6"/>
+              </a:solidFill>
+            </a:endParaRPr>
+          </a:p>
+        </p:txBody>
+      </p:sp>
+      <p:sp>
+        <p:nvSpPr>
+          <p:cNvPr id="38" name="TextBox 37"/>
+          <p:cNvSpPr txBox="1"/>
+          <p:nvPr/>
+        </p:nvSpPr>
+        <p:spPr>
+          <a:xfrm>
+            <a:off x="4259033" y="3818159"/>
+            <a:ext cx="326571" cy="369332"/>
+          </a:xfrm>
+          <a:prstGeom prst="rect">
+            <a:avLst/>
+          </a:prstGeom>
+          <a:noFill/>
+        </p:spPr>
+        <p:txBody>
+          <a:bodyPr wrap="square" rtlCol="0">
+            <a:spAutoFit/>
+          </a:bodyPr>
+          <a:lstStyle/>
+          <a:p>
+            <a:r>
+              <a:rPr lang="en-US" dirty="0" smtClean="0">
+                <a:solidFill>
+                  <a:schemeClr val="accent6"/>
+                </a:solidFill>
+              </a:rPr>
+              <a:t>1</a:t>
+            </a:r>
+            <a:endParaRPr lang="en-IN" dirty="0">
+              <a:solidFill>
+                <a:schemeClr val="accent6"/>
+              </a:solidFill>
+            </a:endParaRPr>
+          </a:p>
+        </p:txBody>
+      </p:sp>
+      <p:sp>
+        <p:nvSpPr>
+          <p:cNvPr id="39" name="TextBox 38"/>
+          <p:cNvSpPr txBox="1"/>
+          <p:nvPr/>
+        </p:nvSpPr>
+        <p:spPr>
+          <a:xfrm>
+            <a:off x="5227860" y="4558388"/>
+            <a:ext cx="326571" cy="369332"/>
+          </a:xfrm>
+          <a:prstGeom prst="rect">
+            <a:avLst/>
+          </a:prstGeom>
+          <a:noFill/>
+        </p:spPr>
+        <p:txBody>
+          <a:bodyPr wrap="square" rtlCol="0">
+            <a:spAutoFit/>
+          </a:bodyPr>
+          <a:lstStyle/>
+          <a:p>
+            <a:r>
+              <a:rPr lang="en-US" dirty="0" smtClean="0">
+                <a:solidFill>
+                  <a:schemeClr val="accent6"/>
+                </a:solidFill>
+              </a:rPr>
+              <a:t>2</a:t>
+            </a:r>
+            <a:endParaRPr lang="en-IN" dirty="0">
+              <a:solidFill>
+                <a:schemeClr val="accent6"/>
+              </a:solidFill>
+            </a:endParaRPr>
+          </a:p>
+        </p:txBody>
+      </p:sp>
+      <p:sp>
+        <p:nvSpPr>
+          <p:cNvPr id="40" name="TextBox 39"/>
+          <p:cNvSpPr txBox="1"/>
+          <p:nvPr/>
+        </p:nvSpPr>
+        <p:spPr>
+          <a:xfrm>
+            <a:off x="2555414" y="4963881"/>
+            <a:ext cx="326571" cy="369332"/>
+          </a:xfrm>
+          <a:prstGeom prst="rect">
+            <a:avLst/>
+          </a:prstGeom>
+          <a:noFill/>
+        </p:spPr>
+        <p:txBody>
+          <a:bodyPr wrap="square" rtlCol="0">
+            <a:spAutoFit/>
+          </a:bodyPr>
+          <a:lstStyle/>
+          <a:p>
+            <a:r>
+              <a:rPr lang="en-US" dirty="0" smtClean="0">
+                <a:solidFill>
+                  <a:schemeClr val="accent6"/>
+                </a:solidFill>
+              </a:rPr>
+              <a:t>3</a:t>
+            </a:r>
+            <a:endParaRPr lang="en-IN" dirty="0">
+              <a:solidFill>
+                <a:schemeClr val="accent6"/>
+              </a:solidFill>
+            </a:endParaRPr>
+          </a:p>
+        </p:txBody>
+      </p:sp>
+      <p:cxnSp>
+        <p:nvCxnSpPr>
+          <p:cNvPr id="43" name="Straight Arrow Connector 42"/>
+          <p:cNvCxnSpPr/>
+          <p:nvPr/>
+        </p:nvCxnSpPr>
+        <p:spPr>
+          <a:xfrm flipH="1">
+            <a:off x="1834241" y="1875061"/>
+            <a:ext cx="228600" cy="310243"/>
+          </a:xfrm>
+          <a:prstGeom prst="straightConnector1">
+            <a:avLst/>
+          </a:prstGeom>
+          <a:ln>
+            <a:tailEnd type="triangle"/>
+          </a:ln>
+        </p:spPr>
+        <p:style>
+          <a:lnRef idx="3">
+            <a:schemeClr val="accent6"/>
+          </a:lnRef>
+          <a:fillRef idx="0">
+            <a:schemeClr val="accent6"/>
+          </a:fillRef>
+          <a:effectRef idx="2">
+            <a:schemeClr val="accent6"/>
+          </a:effectRef>
+          <a:fontRef idx="minor">
+            <a:schemeClr val="tx1"/>
+          </a:fontRef>
+        </p:style>
+      </p:cxnSp>
+      <p:sp>
+        <p:nvSpPr>
+          <p:cNvPr id="44" name="TextBox 43"/>
+          <p:cNvSpPr txBox="1"/>
+          <p:nvPr/>
+        </p:nvSpPr>
+        <p:spPr>
+          <a:xfrm>
+            <a:off x="1678784" y="1638089"/>
+            <a:ext cx="1143012" cy="276999"/>
+          </a:xfrm>
+          <a:prstGeom prst="rect">
+            <a:avLst/>
+          </a:prstGeom>
+          <a:noFill/>
+        </p:spPr>
+        <p:txBody>
+          <a:bodyPr wrap="square" rtlCol="0">
+            <a:spAutoFit/>
+          </a:bodyPr>
+          <a:lstStyle/>
+          <a:p>
+            <a:r>
+              <a:rPr lang="en-US" sz="1200" dirty="0" smtClean="0">
+                <a:solidFill>
+                  <a:schemeClr val="accent6"/>
+                </a:solidFill>
+              </a:rPr>
+              <a:t>Expense tab</a:t>
+            </a:r>
+            <a:endParaRPr lang="en-IN" sz="1200" dirty="0">
+              <a:solidFill>
+                <a:schemeClr val="accent6"/>
+              </a:solidFill>
+            </a:endParaRPr>
+          </a:p>
+        </p:txBody>
+      </p:sp>
+      <p:cxnSp>
+        <p:nvCxnSpPr>
+          <p:cNvPr id="45" name="Straight Arrow Connector 44"/>
+          <p:cNvCxnSpPr/>
+          <p:nvPr/>
+        </p:nvCxnSpPr>
+        <p:spPr>
+          <a:xfrm flipV="1">
+            <a:off x="4057650" y="5557151"/>
+            <a:ext cx="114300" cy="280313"/>
+          </a:xfrm>
+          <a:prstGeom prst="straightConnector1">
+            <a:avLst/>
+          </a:prstGeom>
+          <a:ln>
+            <a:tailEnd type="triangle"/>
+          </a:ln>
+        </p:spPr>
+        <p:style>
+          <a:lnRef idx="3">
+            <a:schemeClr val="accent6"/>
+          </a:lnRef>
+          <a:fillRef idx="0">
+            <a:schemeClr val="accent6"/>
+          </a:fillRef>
+          <a:effectRef idx="2">
+            <a:schemeClr val="accent6"/>
+          </a:effectRef>
+          <a:fontRef idx="minor">
+            <a:schemeClr val="tx1"/>
+          </a:fontRef>
+        </p:style>
+      </p:cxnSp>
+      <p:sp>
+        <p:nvSpPr>
+          <p:cNvPr id="47" name="Rectangle 46"/>
+          <p:cNvSpPr/>
+          <p:nvPr/>
+        </p:nvSpPr>
+        <p:spPr>
+          <a:xfrm>
+            <a:off x="3940632" y="5826575"/>
+            <a:ext cx="326571" cy="277585"/>
+          </a:xfrm>
+          <a:prstGeom prst="rect">
+            <a:avLst/>
+          </a:prstGeom>
+          <a:solidFill>
+            <a:schemeClr val="tx1"/>
+          </a:solidFill>
+          <a:ln>
+            <a:solidFill>
+              <a:schemeClr val="accent6"/>
+            </a:solidFill>
+          </a:ln>
+        </p:spPr>
+        <p:style>
+          <a:lnRef idx="2">
+            <a:schemeClr val="accent1">
+              <a:shade val="50000"/>
+            </a:schemeClr>
+          </a:lnRef>
+          <a:fillRef idx="1">
+            <a:schemeClr val="accent1"/>
+          </a:fillRef>
+          <a:effectRef idx="0">
+            <a:schemeClr val="accent1"/>
+          </a:effectRef>
+          <a:fontRef idx="minor">
+            <a:schemeClr val="lt1"/>
+          </a:fontRef>
+        </p:style>
+        <p:txBody>
+          <a:bodyPr rtlCol="0" anchor="ctr"/>
+          <a:lstStyle/>
+          <a:p>
+            <a:pPr algn="ctr"/>
+            <a:endParaRPr lang="en-IN">
+              <a:ln>
+                <a:solidFill>
+                  <a:schemeClr val="accent6"/>
+                </a:solidFill>
+              </a:ln>
+              <a:solidFill>
+                <a:schemeClr val="tx1"/>
+              </a:solidFill>
+            </a:endParaRPr>
+          </a:p>
+        </p:txBody>
+      </p:sp>
+      <p:sp>
+        <p:nvSpPr>
+          <p:cNvPr id="48" name="TextBox 47"/>
+          <p:cNvSpPr txBox="1"/>
+          <p:nvPr/>
+        </p:nvSpPr>
+        <p:spPr>
+          <a:xfrm>
+            <a:off x="3948789" y="5793920"/>
+            <a:ext cx="326571" cy="369332"/>
+          </a:xfrm>
+          <a:prstGeom prst="rect">
+            <a:avLst/>
+          </a:prstGeom>
+          <a:noFill/>
+        </p:spPr>
+        <p:txBody>
+          <a:bodyPr wrap="square" rtlCol="0">
+            <a:spAutoFit/>
+          </a:bodyPr>
+          <a:lstStyle/>
+          <a:p>
+            <a:r>
+              <a:rPr lang="en-US" dirty="0">
+                <a:solidFill>
+                  <a:schemeClr val="accent6"/>
+                </a:solidFill>
+              </a:rPr>
+              <a:t>4</a:t>
+            </a:r>
+            <a:endParaRPr lang="en-IN" dirty="0">
+              <a:solidFill>
+                <a:schemeClr val="accent6"/>
+              </a:solidFill>
+            </a:endParaRPr>
+          </a:p>
+        </p:txBody>
+      </p:sp>
+    </p:spTree>
+    <p:extLst>
+      <p:ext uri="{BB962C8B-B14F-4D97-AF65-F5344CB8AC3E}">
+        <p14:creationId xmlns:p14="http://schemas.microsoft.com/office/powerpoint/2010/main" val="3350127379"/>
+      </p:ext>
+    </p:extLst>
+  </p:cSld>
+  <p:clrMapOvr>
+    <a:masterClrMapping/>
+  </p:clrMapOvr>
+</p:sld>
+</file>
+
+<file path=ppt/slides/slide6.xml><?xml version="1.0" encoding="utf-8"?>
+<p:sld xmlns:a="http://schemas.openxmlformats.org/drawingml/2006/main" xmlns:r="http://schemas.openxmlformats.org/officeDocument/2006/relationships" xmlns:p="http://schemas.openxmlformats.org/presentationml/2006/main">
+  <p:cSld>
+    <p:spTree>
+      <p:nvGrpSpPr>
+        <p:cNvPr id="1" name=""/>
+        <p:cNvGrpSpPr/>
+        <p:nvPr/>
+      </p:nvGrpSpPr>
+      <p:grpSpPr>
+        <a:xfrm>
+          <a:off x="0" y="0"/>
+          <a:ext cx="0" cy="0"/>
+          <a:chOff x="0" y="0"/>
+          <a:chExt cx="0" cy="0"/>
+        </a:xfrm>
+      </p:grpSpPr>
+      <p:sp>
+        <p:nvSpPr>
+          <p:cNvPr id="4" name="Rectangle 3"/>
+          <p:cNvSpPr/>
+          <p:nvPr/>
+        </p:nvSpPr>
+        <p:spPr>
+          <a:xfrm>
+            <a:off x="220435" y="158821"/>
+            <a:ext cx="11895364" cy="923330"/>
+          </a:xfrm>
+          <a:prstGeom prst="rect">
+            <a:avLst/>
+          </a:prstGeom>
+          <a:noFill/>
+        </p:spPr>
+        <p:txBody>
+          <a:bodyPr wrap="square" lIns="91440" tIns="45720" rIns="91440" bIns="45720">
+            <a:spAutoFit/>
+          </a:bodyPr>
+          <a:lstStyle/>
+          <a:p>
+            <a:pPr algn="ctr"/>
+            <a:r>
+              <a:rPr lang="en-US" sz="5400" b="1" dirty="0" smtClean="0">
+                <a:ln w="12700">
+                  <a:solidFill>
+                    <a:schemeClr val="accent1"/>
+                  </a:solidFill>
+                  <a:prstDash val="solid"/>
+                </a:ln>
+                <a:pattFill prst="pct50">
+                  <a:fgClr>
+                    <a:schemeClr val="accent1"/>
+                  </a:fgClr>
+                  <a:bgClr>
+                    <a:schemeClr val="accent1">
+                      <a:lumMod val="20000"/>
+                      <a:lumOff val="80000"/>
+                    </a:schemeClr>
+                  </a:bgClr>
+                </a:pattFill>
+                <a:effectLst>
+                  <a:outerShdw dist="38100" dir="2640000" algn="bl" rotWithShape="0">
+                    <a:schemeClr val="accent1"/>
+                  </a:outerShdw>
+                </a:effectLst>
+              </a:rPr>
+              <a:t>Expense</a:t>
+            </a:r>
+            <a:endParaRPr lang="en-US" sz="5400" b="1" dirty="0">
+              <a:ln w="12700">
+                <a:solidFill>
+                  <a:schemeClr val="accent1"/>
+                </a:solidFill>
+                <a:prstDash val="solid"/>
+              </a:ln>
+              <a:pattFill prst="pct50">
+                <a:fgClr>
+                  <a:schemeClr val="accent1"/>
+                </a:fgClr>
+                <a:bgClr>
+                  <a:schemeClr val="accent1">
+                    <a:lumMod val="20000"/>
+                    <a:lumOff val="80000"/>
+                  </a:schemeClr>
+                </a:bgClr>
+              </a:pattFill>
+              <a:effectLst>
+                <a:outerShdw dist="38100" dir="2640000" algn="bl" rotWithShape="0">
+                  <a:schemeClr val="accent1"/>
+                </a:outerShdw>
+              </a:effectLst>
+            </a:endParaRPr>
+          </a:p>
+        </p:txBody>
+      </p:sp>
+      <p:sp>
+        <p:nvSpPr>
+          <p:cNvPr id="6" name="TextBox 5"/>
+          <p:cNvSpPr txBox="1"/>
+          <p:nvPr/>
+        </p:nvSpPr>
+        <p:spPr>
+          <a:xfrm>
+            <a:off x="1012370" y="1082151"/>
+            <a:ext cx="10311493" cy="369332"/>
+          </a:xfrm>
+          <a:prstGeom prst="rect">
+            <a:avLst/>
+          </a:prstGeom>
+          <a:noFill/>
+        </p:spPr>
+        <p:txBody>
+          <a:bodyPr wrap="square" rtlCol="0">
+            <a:spAutoFit/>
+          </a:bodyPr>
+          <a:lstStyle/>
+          <a:p>
+            <a:pPr marL="342900" indent="-342900">
+              <a:buFont typeface="Arial" panose="020B0604020202020204" pitchFamily="34" charset="0"/>
+              <a:buChar char="•"/>
+            </a:pPr>
+            <a:r>
+              <a:rPr lang="en-US" dirty="0" smtClean="0"/>
+              <a:t>Center </a:t>
+            </a:r>
+            <a:r>
+              <a:rPr lang="gu-IN" dirty="0" smtClean="0"/>
+              <a:t>નો ખર્ચ ઉમેરવા માટે </a:t>
+            </a:r>
+            <a:r>
+              <a:rPr lang="en-US" dirty="0" smtClean="0"/>
+              <a:t>Expense</a:t>
+            </a:r>
+            <a:r>
+              <a:rPr lang="gu-IN" dirty="0" smtClean="0"/>
+              <a:t> tab ઉપર click કરવું.</a:t>
+            </a:r>
+            <a:endParaRPr lang="gu-IN" dirty="0" smtClean="0"/>
+          </a:p>
+        </p:txBody>
+      </p:sp>
+      <p:sp>
+        <p:nvSpPr>
+          <p:cNvPr id="7" name="TextBox 6"/>
+          <p:cNvSpPr txBox="1"/>
+          <p:nvPr/>
+        </p:nvSpPr>
+        <p:spPr>
+          <a:xfrm>
+            <a:off x="1012370" y="1616529"/>
+            <a:ext cx="10001250" cy="5078313"/>
+          </a:xfrm>
+          <a:prstGeom prst="rect">
+            <a:avLst/>
+          </a:prstGeom>
+          <a:noFill/>
+        </p:spPr>
+        <p:txBody>
+          <a:bodyPr wrap="square" rtlCol="0">
+            <a:spAutoFit/>
+          </a:bodyPr>
+          <a:lstStyle/>
+          <a:p>
+            <a:pPr marL="342900" indent="-342900">
+              <a:lnSpc>
+                <a:spcPct val="150000"/>
+              </a:lnSpc>
+              <a:buFont typeface="+mj-lt"/>
+              <a:buAutoNum type="arabicPeriod"/>
+            </a:pPr>
+            <a:r>
+              <a:rPr lang="gu-IN" dirty="0" smtClean="0"/>
+              <a:t>ખર્ચ ની માહિતી add કરવા માટે.</a:t>
+            </a:r>
+            <a:endParaRPr lang="en-US" dirty="0" smtClean="0"/>
+          </a:p>
+          <a:p>
+            <a:pPr marL="342900" indent="-342900">
+              <a:lnSpc>
+                <a:spcPct val="150000"/>
+              </a:lnSpc>
+              <a:buFont typeface="+mj-lt"/>
+              <a:buAutoNum type="arabicPeriod"/>
+            </a:pPr>
+            <a:r>
+              <a:rPr lang="gu-IN" dirty="0" smtClean="0"/>
+              <a:t>ખર્ચ ની amount દાખલ કરવા માટે.</a:t>
+            </a:r>
+          </a:p>
+          <a:p>
+            <a:pPr marL="342900" indent="-342900">
+              <a:lnSpc>
+                <a:spcPct val="150000"/>
+              </a:lnSpc>
+              <a:buFont typeface="+mj-lt"/>
+              <a:buAutoNum type="arabicPeriod"/>
+            </a:pPr>
+            <a:r>
+              <a:rPr lang="gu-IN" dirty="0" smtClean="0"/>
+              <a:t>કરવામાં આવેલા ખર્ચ નું center </a:t>
+            </a:r>
+            <a:r>
+              <a:rPr lang="en-IN" dirty="0" smtClean="0"/>
+              <a:t>S</a:t>
+            </a:r>
+            <a:r>
+              <a:rPr lang="gu-IN" dirty="0" smtClean="0"/>
+              <a:t>elect કરવા માટે.</a:t>
+            </a:r>
+            <a:endParaRPr lang="en-US" dirty="0" smtClean="0"/>
+          </a:p>
+          <a:p>
+            <a:pPr marL="342900" indent="-342900">
+              <a:lnSpc>
+                <a:spcPct val="150000"/>
+              </a:lnSpc>
+              <a:buFont typeface="+mj-lt"/>
+              <a:buAutoNum type="arabicPeriod"/>
+            </a:pPr>
+            <a:r>
+              <a:rPr lang="gu-IN" dirty="0" smtClean="0"/>
+              <a:t>ખર્ચ save કરવા માટે.</a:t>
+            </a:r>
+          </a:p>
+          <a:p>
+            <a:pPr marL="342900" indent="-342900">
+              <a:lnSpc>
+                <a:spcPct val="150000"/>
+              </a:lnSpc>
+              <a:buFont typeface="+mj-lt"/>
+              <a:buAutoNum type="arabicPeriod"/>
+            </a:pPr>
+            <a:r>
+              <a:rPr lang="gu-IN" dirty="0" smtClean="0"/>
+              <a:t>કરવામાં આવેલા ખર્ચ નું list દર્શાવે છે.</a:t>
+            </a:r>
+          </a:p>
+          <a:p>
+            <a:pPr marL="342900" indent="-342900">
+              <a:lnSpc>
+                <a:spcPct val="150000"/>
+              </a:lnSpc>
+              <a:buFont typeface="+mj-lt"/>
+              <a:buAutoNum type="arabicPeriod"/>
+            </a:pPr>
+            <a:r>
+              <a:rPr lang="en-IN" dirty="0" smtClean="0"/>
+              <a:t>L</a:t>
+            </a:r>
+            <a:r>
+              <a:rPr lang="gu-IN" dirty="0" smtClean="0"/>
+              <a:t>ist મારથી ખર્ચ search કરવા માટે.</a:t>
+            </a:r>
+          </a:p>
+          <a:p>
+            <a:pPr marL="342900" indent="-342900">
+              <a:lnSpc>
+                <a:spcPct val="150000"/>
+              </a:lnSpc>
+              <a:buFont typeface="+mj-lt"/>
+              <a:buAutoNum type="arabicPeriod"/>
+            </a:pPr>
+            <a:r>
+              <a:rPr lang="en-IN" dirty="0" smtClean="0"/>
+              <a:t>C</a:t>
+            </a:r>
+            <a:r>
+              <a:rPr lang="gu-IN" dirty="0" smtClean="0"/>
+              <a:t>enter select કરવા માટે.</a:t>
+            </a:r>
+          </a:p>
+          <a:p>
+            <a:pPr marL="342900" indent="-342900">
+              <a:lnSpc>
+                <a:spcPct val="150000"/>
+              </a:lnSpc>
+              <a:buFont typeface="+mj-lt"/>
+              <a:buAutoNum type="arabicPeriod"/>
+            </a:pPr>
+            <a:r>
+              <a:rPr lang="en-IN" dirty="0" smtClean="0"/>
+              <a:t>U</a:t>
+            </a:r>
+            <a:r>
+              <a:rPr lang="gu-IN" dirty="0" smtClean="0"/>
+              <a:t>ser select કરવા માટે .</a:t>
+            </a:r>
+            <a:endParaRPr lang="gu-IN" dirty="0"/>
+          </a:p>
+          <a:p>
+            <a:pPr marL="342900" indent="-342900">
+              <a:lnSpc>
+                <a:spcPct val="150000"/>
+              </a:lnSpc>
+              <a:buFont typeface="+mj-lt"/>
+              <a:buAutoNum type="arabicPeriod"/>
+            </a:pPr>
+            <a:r>
+              <a:rPr lang="gu-IN" dirty="0" smtClean="0"/>
+              <a:t> તારીખ select કરવા માટે.</a:t>
+            </a:r>
+          </a:p>
+          <a:p>
+            <a:pPr marL="342900" indent="-342900">
+              <a:lnSpc>
+                <a:spcPct val="150000"/>
+              </a:lnSpc>
+              <a:buFont typeface="+mj-lt"/>
+              <a:buAutoNum type="arabicPeriod"/>
+            </a:pPr>
+            <a:r>
+              <a:rPr lang="en-IN" dirty="0" smtClean="0"/>
+              <a:t>S</a:t>
+            </a:r>
+            <a:r>
+              <a:rPr lang="gu-IN" dirty="0" smtClean="0"/>
+              <a:t>elect કરેલા data list માં search કરવા માટે.</a:t>
+            </a:r>
+          </a:p>
+          <a:p>
+            <a:pPr marL="342900" indent="-342900">
+              <a:lnSpc>
+                <a:spcPct val="150000"/>
+              </a:lnSpc>
+              <a:buFont typeface="+mj-lt"/>
+              <a:buAutoNum type="arabicPeriod"/>
+            </a:pPr>
+            <a:r>
+              <a:rPr lang="en-IN" dirty="0"/>
+              <a:t>S</a:t>
+            </a:r>
+            <a:r>
+              <a:rPr lang="gu-IN" dirty="0"/>
+              <a:t>elect કરેલા data </a:t>
+            </a:r>
+            <a:r>
+              <a:rPr lang="gu-IN" dirty="0" smtClean="0"/>
+              <a:t>clear </a:t>
+            </a:r>
+            <a:r>
+              <a:rPr lang="gu-IN" dirty="0"/>
+              <a:t>કરવા </a:t>
+            </a:r>
+            <a:r>
+              <a:rPr lang="gu-IN" dirty="0" smtClean="0"/>
+              <a:t>માટે.</a:t>
+            </a:r>
+          </a:p>
+          <a:p>
+            <a:pPr marL="342900" indent="-342900">
+              <a:lnSpc>
+                <a:spcPct val="150000"/>
+              </a:lnSpc>
+              <a:buFont typeface="+mj-lt"/>
+              <a:buAutoNum type="arabicPeriod"/>
+            </a:pPr>
+            <a:endParaRPr lang="gu-IN" dirty="0"/>
+          </a:p>
+        </p:txBody>
+      </p:sp>
+    </p:spTree>
+    <p:extLst>
+      <p:ext uri="{BB962C8B-B14F-4D97-AF65-F5344CB8AC3E}">
+        <p14:creationId xmlns:p14="http://schemas.microsoft.com/office/powerpoint/2010/main" val="3584430135"/>
       </p:ext>
     </p:extLst>
   </p:cSld>
